--- a/2026-02-21_늘푸른교회_.pptx
+++ b/2026-02-21_늘푸른교회_.pptx
@@ -178,6 +178,17 @@
     <p:sldId id="426" r:id="rId177"/>
     <p:sldId id="427" r:id="rId178"/>
     <p:sldId id="428" r:id="rId179"/>
+    <p:sldId id="429" r:id="rId180"/>
+    <p:sldId id="430" r:id="rId181"/>
+    <p:sldId id="431" r:id="rId182"/>
+    <p:sldId id="432" r:id="rId183"/>
+    <p:sldId id="433" r:id="rId184"/>
+    <p:sldId id="434" r:id="rId185"/>
+    <p:sldId id="435" r:id="rId186"/>
+    <p:sldId id="436" r:id="rId187"/>
+    <p:sldId id="437" r:id="rId188"/>
+    <p:sldId id="438" r:id="rId189"/>
+    <p:sldId id="439" r:id="rId190"/>
   </p:sldIdLst>
   <p:sldSz cx="12192119" cy="6858000" type="screen4x3"/>
   <p:notesSz cx="6858000" cy="9144000"/>
@@ -7557,6 +7568,608 @@
     <p:bg>
       <p:bgPr>
         <a:solidFill>
+          <a:srgbClr val="00FF00"/>
+        </a:solidFill>
+        <a:effectLst/>
+      </p:bgPr>
+    </p:bg>
+    <p:spTree>
+      <p:nvGrpSpPr>
+        <p:cNvPr id="1" name=""/>
+        <p:cNvGrpSpPr/>
+        <p:nvPr/>
+      </p:nvGrpSpPr>
+      <p:grpSpPr/>
+      <p:sp>
+        <p:nvSpPr>
+          <p:cNvPr id="2" name="TextBox 1"/>
+          <p:cNvSpPr txBox="1"/>
+          <p:nvPr/>
+        </p:nvSpPr>
+        <p:spPr>
+          <a:xfrm>
+            <a:off x="624059" y="5400000"/>
+            <a:ext cx="10944000" cy="1188000"/>
+          </a:xfrm>
+          <a:prstGeom prst="rect">
+            <a:avLst/>
+          </a:prstGeom>
+          <a:solidFill>
+            <a:srgbClr val="203864"/>
+          </a:solidFill>
+        </p:spPr>
+        <p:txBody>
+          <a:bodyPr wrap="none" anchor="ctr">
+            <a:normAutofit/>
+          </a:bodyPr>
+          <a:lstStyle/>
+          <a:p>
+            <a:pPr algn="ctr">
+              <a:defRPr sz="3500">
+                <a:solidFill>
+                  <a:srgbClr val="FFFFFF"/>
+                </a:solidFill>
+                <a:latin typeface="Pretendard Semibold"/>
+              </a:defRPr>
+            </a:pPr>
+            <a:r>
+              <a:t>주님 다시 오실때까지 나는 이 길을 가리라</a:t>
+            </a:r>
+          </a:p>
+        </p:txBody>
+      </p:sp>
+      <p:sp>
+        <p:nvSpPr>
+          <p:cNvPr id="3" name="TextBox 2"/>
+          <p:cNvSpPr txBox="1"/>
+          <p:nvPr/>
+        </p:nvSpPr>
+        <p:spPr>
+          <a:xfrm>
+            <a:off x="8506800" y="4860000"/>
+            <a:ext cx="3060000" cy="540000"/>
+          </a:xfrm>
+          <a:prstGeom prst="rect">
+            <a:avLst/>
+          </a:prstGeom>
+          <a:solidFill>
+            <a:srgbClr val="FFFFFF"/>
+          </a:solidFill>
+        </p:spPr>
+        <p:txBody>
+          <a:bodyPr wrap="none" anchor="ctr">
+            <a:normAutofit/>
+          </a:bodyPr>
+          <a:lstStyle/>
+          <a:p>
+            <a:pPr algn="ctr">
+              <a:defRPr sz="2000">
+                <a:solidFill>
+                  <a:srgbClr val="000000"/>
+                </a:solidFill>
+                <a:latin typeface="Pretendard Black"/>
+              </a:defRPr>
+            </a:pPr>
+            <a:r>
+              <a:t>주님 다시 오실 때 까지</a:t>
+            </a:r>
+          </a:p>
+        </p:txBody>
+      </p:sp>
+    </p:spTree>
+  </p:cSld>
+  <p:clrMapOvr>
+    <a:masterClrMapping/>
+  </p:clrMapOvr>
+</p:sld>
+</file>
+
+<file path=ppt/slides/slide16.xml><?xml version="1.0" encoding="utf-8"?>
+<p:sld xmlns:a="http://schemas.openxmlformats.org/drawingml/2006/main" xmlns:p="http://schemas.openxmlformats.org/presentationml/2006/main" xmlns:r="http://schemas.openxmlformats.org/officeDocument/2006/relationships">
+  <p:cSld>
+    <p:bg>
+      <p:bgPr>
+        <a:solidFill>
+          <a:srgbClr val="00FF00"/>
+        </a:solidFill>
+        <a:effectLst/>
+      </p:bgPr>
+    </p:bg>
+    <p:spTree>
+      <p:nvGrpSpPr>
+        <p:cNvPr id="1" name=""/>
+        <p:cNvGrpSpPr/>
+        <p:nvPr/>
+      </p:nvGrpSpPr>
+      <p:grpSpPr/>
+    </p:spTree>
+  </p:cSld>
+  <p:clrMapOvr>
+    <a:masterClrMapping/>
+  </p:clrMapOvr>
+</p:sld>
+</file>
+
+<file path=ppt/slides/slide160.xml><?xml version="1.0" encoding="utf-8"?>
+<p:sld xmlns:a="http://schemas.openxmlformats.org/drawingml/2006/main" xmlns:p="http://schemas.openxmlformats.org/presentationml/2006/main" xmlns:r="http://schemas.openxmlformats.org/officeDocument/2006/relationships">
+  <p:cSld>
+    <p:bg>
+      <p:bgPr>
+        <a:solidFill>
+          <a:srgbClr val="00FF00"/>
+        </a:solidFill>
+        <a:effectLst/>
+      </p:bgPr>
+    </p:bg>
+    <p:spTree>
+      <p:nvGrpSpPr>
+        <p:cNvPr id="1" name=""/>
+        <p:cNvGrpSpPr/>
+        <p:nvPr/>
+      </p:nvGrpSpPr>
+      <p:grpSpPr/>
+      <p:sp>
+        <p:nvSpPr>
+          <p:cNvPr id="2" name="TextBox 1"/>
+          <p:cNvSpPr txBox="1"/>
+          <p:nvPr/>
+        </p:nvSpPr>
+        <p:spPr>
+          <a:xfrm>
+            <a:off x="624059" y="5400000"/>
+            <a:ext cx="10944000" cy="1188000"/>
+          </a:xfrm>
+          <a:prstGeom prst="rect">
+            <a:avLst/>
+          </a:prstGeom>
+          <a:solidFill>
+            <a:srgbClr val="203864"/>
+          </a:solidFill>
+        </p:spPr>
+        <p:txBody>
+          <a:bodyPr wrap="none" anchor="ctr">
+            <a:normAutofit/>
+          </a:bodyPr>
+          <a:lstStyle/>
+          <a:p>
+            <a:pPr algn="ctr">
+              <a:defRPr sz="3500">
+                <a:solidFill>
+                  <a:srgbClr val="FFFFFF"/>
+                </a:solidFill>
+                <a:latin typeface="Pretendard Semibold"/>
+              </a:defRPr>
+            </a:pPr>
+            <a:r>
+              <a:t>좁은문 좁은길 나의 십자가 지고</a:t>
+            </a:r>
+          </a:p>
+        </p:txBody>
+      </p:sp>
+    </p:spTree>
+  </p:cSld>
+  <p:clrMapOvr>
+    <a:masterClrMapping/>
+  </p:clrMapOvr>
+</p:sld>
+</file>
+
+<file path=ppt/slides/slide161.xml><?xml version="1.0" encoding="utf-8"?>
+<p:sld xmlns:a="http://schemas.openxmlformats.org/drawingml/2006/main" xmlns:p="http://schemas.openxmlformats.org/presentationml/2006/main" xmlns:r="http://schemas.openxmlformats.org/officeDocument/2006/relationships">
+  <p:cSld>
+    <p:bg>
+      <p:bgPr>
+        <a:solidFill>
+          <a:srgbClr val="00FF00"/>
+        </a:solidFill>
+        <a:effectLst/>
+      </p:bgPr>
+    </p:bg>
+    <p:spTree>
+      <p:nvGrpSpPr>
+        <p:cNvPr id="1" name=""/>
+        <p:cNvGrpSpPr/>
+        <p:nvPr/>
+      </p:nvGrpSpPr>
+      <p:grpSpPr/>
+      <p:sp>
+        <p:nvSpPr>
+          <p:cNvPr id="2" name="TextBox 1"/>
+          <p:cNvSpPr txBox="1"/>
+          <p:nvPr/>
+        </p:nvSpPr>
+        <p:spPr>
+          <a:xfrm>
+            <a:off x="624059" y="5400000"/>
+            <a:ext cx="10944000" cy="1188000"/>
+          </a:xfrm>
+          <a:prstGeom prst="rect">
+            <a:avLst/>
+          </a:prstGeom>
+          <a:solidFill>
+            <a:srgbClr val="203864"/>
+          </a:solidFill>
+        </p:spPr>
+        <p:txBody>
+          <a:bodyPr wrap="none" anchor="ctr">
+            <a:normAutofit/>
+          </a:bodyPr>
+          <a:lstStyle/>
+          <a:p>
+            <a:pPr algn="ctr">
+              <a:defRPr sz="3500">
+                <a:solidFill>
+                  <a:srgbClr val="FFFFFF"/>
+                </a:solidFill>
+                <a:latin typeface="Pretendard Semibold"/>
+              </a:defRPr>
+            </a:pPr>
+            <a:r>
+              <a:t>나의 가는 이 길 끝에서 나는 주님을 보리라</a:t>
+            </a:r>
+          </a:p>
+        </p:txBody>
+      </p:sp>
+    </p:spTree>
+  </p:cSld>
+  <p:clrMapOvr>
+    <a:masterClrMapping/>
+  </p:clrMapOvr>
+</p:sld>
+</file>
+
+<file path=ppt/slides/slide162.xml><?xml version="1.0" encoding="utf-8"?>
+<p:sld xmlns:a="http://schemas.openxmlformats.org/drawingml/2006/main" xmlns:p="http://schemas.openxmlformats.org/presentationml/2006/main" xmlns:r="http://schemas.openxmlformats.org/officeDocument/2006/relationships">
+  <p:cSld>
+    <p:bg>
+      <p:bgPr>
+        <a:solidFill>
+          <a:srgbClr val="00FF00"/>
+        </a:solidFill>
+        <a:effectLst/>
+      </p:bgPr>
+    </p:bg>
+    <p:spTree>
+      <p:nvGrpSpPr>
+        <p:cNvPr id="1" name=""/>
+        <p:cNvGrpSpPr/>
+        <p:nvPr/>
+      </p:nvGrpSpPr>
+      <p:grpSpPr/>
+      <p:sp>
+        <p:nvSpPr>
+          <p:cNvPr id="2" name="TextBox 1"/>
+          <p:cNvSpPr txBox="1"/>
+          <p:nvPr/>
+        </p:nvSpPr>
+        <p:spPr>
+          <a:xfrm>
+            <a:off x="624059" y="5400000"/>
+            <a:ext cx="10944000" cy="1188000"/>
+          </a:xfrm>
+          <a:prstGeom prst="rect">
+            <a:avLst/>
+          </a:prstGeom>
+          <a:solidFill>
+            <a:srgbClr val="203864"/>
+          </a:solidFill>
+        </p:spPr>
+        <p:txBody>
+          <a:bodyPr wrap="none" anchor="ctr">
+            <a:normAutofit/>
+          </a:bodyPr>
+          <a:lstStyle/>
+          <a:p>
+            <a:pPr algn="ctr">
+              <a:defRPr sz="3500">
+                <a:solidFill>
+                  <a:srgbClr val="FFFFFF"/>
+                </a:solidFill>
+                <a:latin typeface="Pretendard Semibold"/>
+              </a:defRPr>
+            </a:pPr>
+            <a:r>
+              <a:t>영광의 내 주님 나를 맞아 주시리</a:t>
+            </a:r>
+          </a:p>
+        </p:txBody>
+      </p:sp>
+    </p:spTree>
+  </p:cSld>
+  <p:clrMapOvr>
+    <a:masterClrMapping/>
+  </p:clrMapOvr>
+</p:sld>
+</file>
+
+<file path=ppt/slides/slide163.xml><?xml version="1.0" encoding="utf-8"?>
+<p:sld xmlns:a="http://schemas.openxmlformats.org/drawingml/2006/main" xmlns:p="http://schemas.openxmlformats.org/presentationml/2006/main" xmlns:r="http://schemas.openxmlformats.org/officeDocument/2006/relationships">
+  <p:cSld>
+    <p:bg>
+      <p:bgPr>
+        <a:solidFill>
+          <a:srgbClr val="00FF00"/>
+        </a:solidFill>
+        <a:effectLst/>
+      </p:bgPr>
+    </p:bg>
+    <p:spTree>
+      <p:nvGrpSpPr>
+        <p:cNvPr id="1" name=""/>
+        <p:cNvGrpSpPr/>
+        <p:nvPr/>
+      </p:nvGrpSpPr>
+      <p:grpSpPr/>
+      <p:sp>
+        <p:nvSpPr>
+          <p:cNvPr id="2" name="TextBox 1"/>
+          <p:cNvSpPr txBox="1"/>
+          <p:nvPr/>
+        </p:nvSpPr>
+        <p:spPr>
+          <a:xfrm>
+            <a:off x="624059" y="5400000"/>
+            <a:ext cx="10944000" cy="1188000"/>
+          </a:xfrm>
+          <a:prstGeom prst="rect">
+            <a:avLst/>
+          </a:prstGeom>
+          <a:solidFill>
+            <a:srgbClr val="203864"/>
+          </a:solidFill>
+        </p:spPr>
+        <p:txBody>
+          <a:bodyPr wrap="none" anchor="ctr">
+            <a:normAutofit/>
+          </a:bodyPr>
+          <a:lstStyle/>
+          <a:p>
+            <a:pPr algn="ctr">
+              <a:defRPr sz="3500">
+                <a:solidFill>
+                  <a:srgbClr val="FFFFFF"/>
+                </a:solidFill>
+                <a:latin typeface="Pretendard Semibold"/>
+              </a:defRPr>
+            </a:pPr>
+            <a:r>
+              <a:t>주님 다시 오실때까지 나는 일어나 달려 가리라</a:t>
+            </a:r>
+          </a:p>
+        </p:txBody>
+      </p:sp>
+    </p:spTree>
+  </p:cSld>
+  <p:clrMapOvr>
+    <a:masterClrMapping/>
+  </p:clrMapOvr>
+</p:sld>
+</file>
+
+<file path=ppt/slides/slide164.xml><?xml version="1.0" encoding="utf-8"?>
+<p:sld xmlns:a="http://schemas.openxmlformats.org/drawingml/2006/main" xmlns:p="http://schemas.openxmlformats.org/presentationml/2006/main" xmlns:r="http://schemas.openxmlformats.org/officeDocument/2006/relationships">
+  <p:cSld>
+    <p:bg>
+      <p:bgPr>
+        <a:solidFill>
+          <a:srgbClr val="00FF00"/>
+        </a:solidFill>
+        <a:effectLst/>
+      </p:bgPr>
+    </p:bg>
+    <p:spTree>
+      <p:nvGrpSpPr>
+        <p:cNvPr id="1" name=""/>
+        <p:cNvGrpSpPr/>
+        <p:nvPr/>
+      </p:nvGrpSpPr>
+      <p:grpSpPr/>
+      <p:sp>
+        <p:nvSpPr>
+          <p:cNvPr id="2" name="TextBox 1"/>
+          <p:cNvSpPr txBox="1"/>
+          <p:nvPr/>
+        </p:nvSpPr>
+        <p:spPr>
+          <a:xfrm>
+            <a:off x="624059" y="5400000"/>
+            <a:ext cx="10944000" cy="1188000"/>
+          </a:xfrm>
+          <a:prstGeom prst="rect">
+            <a:avLst/>
+          </a:prstGeom>
+          <a:solidFill>
+            <a:srgbClr val="203864"/>
+          </a:solidFill>
+        </p:spPr>
+        <p:txBody>
+          <a:bodyPr wrap="none" anchor="ctr">
+            <a:normAutofit/>
+          </a:bodyPr>
+          <a:lstStyle/>
+          <a:p>
+            <a:pPr algn="ctr">
+              <a:defRPr sz="3500">
+                <a:solidFill>
+                  <a:srgbClr val="FFFFFF"/>
+                </a:solidFill>
+                <a:latin typeface="Pretendard Semibold"/>
+              </a:defRPr>
+            </a:pPr>
+            <a:r>
+              <a:t>주의 영광 온땅 덮을때 나는 일어나 노래하리</a:t>
+            </a:r>
+          </a:p>
+        </p:txBody>
+      </p:sp>
+    </p:spTree>
+  </p:cSld>
+  <p:clrMapOvr>
+    <a:masterClrMapping/>
+  </p:clrMapOvr>
+</p:sld>
+</file>
+
+<file path=ppt/slides/slide165.xml><?xml version="1.0" encoding="utf-8"?>
+<p:sld xmlns:a="http://schemas.openxmlformats.org/drawingml/2006/main" xmlns:p="http://schemas.openxmlformats.org/presentationml/2006/main" xmlns:r="http://schemas.openxmlformats.org/officeDocument/2006/relationships">
+  <p:cSld>
+    <p:bg>
+      <p:bgPr>
+        <a:solidFill>
+          <a:srgbClr val="00FF00"/>
+        </a:solidFill>
+        <a:effectLst/>
+      </p:bgPr>
+    </p:bg>
+    <p:spTree>
+      <p:nvGrpSpPr>
+        <p:cNvPr id="1" name=""/>
+        <p:cNvGrpSpPr/>
+        <p:nvPr/>
+      </p:nvGrpSpPr>
+      <p:grpSpPr/>
+      <p:sp>
+        <p:nvSpPr>
+          <p:cNvPr id="2" name="TextBox 1"/>
+          <p:cNvSpPr txBox="1"/>
+          <p:nvPr/>
+        </p:nvSpPr>
+        <p:spPr>
+          <a:xfrm>
+            <a:off x="624059" y="5400000"/>
+            <a:ext cx="10944000" cy="1188000"/>
+          </a:xfrm>
+          <a:prstGeom prst="rect">
+            <a:avLst/>
+          </a:prstGeom>
+          <a:solidFill>
+            <a:srgbClr val="203864"/>
+          </a:solidFill>
+        </p:spPr>
+        <p:txBody>
+          <a:bodyPr wrap="none" anchor="ctr">
+            <a:normAutofit/>
+          </a:bodyPr>
+          <a:lstStyle/>
+          <a:p>
+            <a:pPr algn="ctr">
+              <a:defRPr sz="3500">
+                <a:solidFill>
+                  <a:srgbClr val="FFFFFF"/>
+                </a:solidFill>
+                <a:latin typeface="Pretendard Semibold"/>
+              </a:defRPr>
+            </a:pPr>
+            <a:r>
+              <a:t>내 사모하는 주님 온세상 구주시라</a:t>
+            </a:r>
+          </a:p>
+        </p:txBody>
+      </p:sp>
+    </p:spTree>
+  </p:cSld>
+  <p:clrMapOvr>
+    <a:masterClrMapping/>
+  </p:clrMapOvr>
+</p:sld>
+</file>
+
+<file path=ppt/slides/slide166.xml><?xml version="1.0" encoding="utf-8"?>
+<p:sld xmlns:a="http://schemas.openxmlformats.org/drawingml/2006/main" xmlns:p="http://schemas.openxmlformats.org/presentationml/2006/main" xmlns:r="http://schemas.openxmlformats.org/officeDocument/2006/relationships">
+  <p:cSld>
+    <p:bg>
+      <p:bgPr>
+        <a:solidFill>
+          <a:srgbClr val="00FF00"/>
+        </a:solidFill>
+        <a:effectLst/>
+      </p:bgPr>
+    </p:bg>
+    <p:spTree>
+      <p:nvGrpSpPr>
+        <p:cNvPr id="1" name=""/>
+        <p:cNvGrpSpPr/>
+        <p:nvPr/>
+      </p:nvGrpSpPr>
+      <p:grpSpPr/>
+      <p:sp>
+        <p:nvSpPr>
+          <p:cNvPr id="2" name="TextBox 1"/>
+          <p:cNvSpPr txBox="1"/>
+          <p:nvPr/>
+        </p:nvSpPr>
+        <p:spPr>
+          <a:xfrm>
+            <a:off x="624059" y="5400000"/>
+            <a:ext cx="10944000" cy="1188000"/>
+          </a:xfrm>
+          <a:prstGeom prst="rect">
+            <a:avLst/>
+          </a:prstGeom>
+          <a:solidFill>
+            <a:srgbClr val="203864"/>
+          </a:solidFill>
+        </p:spPr>
+        <p:txBody>
+          <a:bodyPr wrap="none" anchor="ctr">
+            <a:normAutofit/>
+          </a:bodyPr>
+          <a:lstStyle/>
+          <a:p>
+            <a:pPr algn="ctr">
+              <a:defRPr sz="3500">
+                <a:solidFill>
+                  <a:srgbClr val="FFFFFF"/>
+                </a:solidFill>
+                <a:latin typeface="Pretendard Semibold"/>
+              </a:defRPr>
+            </a:pPr>
+            <a:r>
+              <a:t>내 사모하는 주님 영광의 왕이시라</a:t>
+            </a:r>
+          </a:p>
+        </p:txBody>
+      </p:sp>
+    </p:spTree>
+  </p:cSld>
+  <p:clrMapOvr>
+    <a:masterClrMapping/>
+  </p:clrMapOvr>
+</p:sld>
+</file>
+
+<file path=ppt/slides/slide167.xml><?xml version="1.0" encoding="utf-8"?>
+<p:sld xmlns:a="http://schemas.openxmlformats.org/drawingml/2006/main" xmlns:p="http://schemas.openxmlformats.org/presentationml/2006/main" xmlns:r="http://schemas.openxmlformats.org/officeDocument/2006/relationships">
+  <p:cSld>
+    <p:bg>
+      <p:bgPr>
+        <a:solidFill>
+          <a:srgbClr val="00FF00"/>
+        </a:solidFill>
+        <a:effectLst/>
+      </p:bgPr>
+    </p:bg>
+    <p:spTree>
+      <p:nvGrpSpPr>
+        <p:cNvPr id="1" name=""/>
+        <p:cNvGrpSpPr/>
+        <p:nvPr/>
+      </p:nvGrpSpPr>
+      <p:grpSpPr/>
+    </p:spTree>
+  </p:cSld>
+  <p:clrMapOvr>
+    <a:masterClrMapping/>
+  </p:clrMapOvr>
+</p:sld>
+</file>
+
+<file path=ppt/slides/slide168.xml><?xml version="1.0" encoding="utf-8"?>
+<p:sld xmlns:a="http://schemas.openxmlformats.org/drawingml/2006/main" xmlns:p="http://schemas.openxmlformats.org/presentationml/2006/main" xmlns:r="http://schemas.openxmlformats.org/officeDocument/2006/relationships">
+  <p:cSld>
+    <p:bg>
+      <p:bgPr>
+        <a:solidFill>
           <a:srgbClr val="000000"/>
         </a:solidFill>
         <a:effectLst/>
@@ -7624,59 +8237,135 @@
 </p:sld>
 </file>
 
-<file path=ppt/slides/slide16.xml><?xml version="1.0" encoding="utf-8"?>
-<p:sld xmlns:a="http://schemas.openxmlformats.org/drawingml/2006/main" xmlns:p="http://schemas.openxmlformats.org/presentationml/2006/main" xmlns:r="http://schemas.openxmlformats.org/officeDocument/2006/relationships">
-  <p:cSld>
-    <p:bg>
-      <p:bgPr>
-        <a:solidFill>
-          <a:srgbClr val="00FF00"/>
-        </a:solidFill>
-        <a:effectLst/>
-      </p:bgPr>
-    </p:bg>
-    <p:spTree>
-      <p:nvGrpSpPr>
-        <p:cNvPr id="1" name=""/>
-        <p:cNvGrpSpPr/>
-        <p:nvPr/>
-      </p:nvGrpSpPr>
-      <p:grpSpPr/>
-    </p:spTree>
-  </p:cSld>
-  <p:clrMapOvr>
-    <a:masterClrMapping/>
-  </p:clrMapOvr>
-</p:sld>
-</file>
-
-<file path=ppt/slides/slide160.xml><?xml version="1.0" encoding="utf-8"?>
-<p:sld xmlns:a="http://schemas.openxmlformats.org/drawingml/2006/main" xmlns:p="http://schemas.openxmlformats.org/presentationml/2006/main" xmlns:r="http://schemas.openxmlformats.org/officeDocument/2006/relationships">
-  <p:cSld>
-    <p:bg>
-      <p:bgPr>
-        <a:solidFill>
-          <a:srgbClr val="00FF00"/>
-        </a:solidFill>
-        <a:effectLst/>
-      </p:bgPr>
-    </p:bg>
-    <p:spTree>
-      <p:nvGrpSpPr>
-        <p:cNvPr id="1" name=""/>
-        <p:cNvGrpSpPr/>
-        <p:nvPr/>
-      </p:nvGrpSpPr>
-      <p:grpSpPr/>
-    </p:spTree>
-  </p:cSld>
-  <p:clrMapOvr>
-    <a:masterClrMapping/>
-  </p:clrMapOvr>
-</p:sld>
-</file>
-
-<file path=ppt/slides/slide161.xml><?xml version="1.0" encoding="utf-8"?>
+<file path=ppt/slides/slide169.xml><?xml version="1.0" encoding="utf-8"?>
+<p:sld xmlns:a="http://schemas.openxmlformats.org/drawingml/2006/main" xmlns:p="http://schemas.openxmlformats.org/presentationml/2006/main" xmlns:r="http://schemas.openxmlformats.org/officeDocument/2006/relationships">
+  <p:cSld>
+    <p:bg>
+      <p:bgPr>
+        <a:solidFill>
+          <a:srgbClr val="00FF00"/>
+        </a:solidFill>
+        <a:effectLst/>
+      </p:bgPr>
+    </p:bg>
+    <p:spTree>
+      <p:nvGrpSpPr>
+        <p:cNvPr id="1" name=""/>
+        <p:cNvGrpSpPr/>
+        <p:nvPr/>
+      </p:nvGrpSpPr>
+      <p:grpSpPr/>
+    </p:spTree>
+  </p:cSld>
+  <p:clrMapOvr>
+    <a:masterClrMapping/>
+  </p:clrMapOvr>
+</p:sld>
+</file>
+
+<file path=ppt/slides/slide17.xml><?xml version="1.0" encoding="utf-8"?>
+<p:sld xmlns:a="http://schemas.openxmlformats.org/drawingml/2006/main" xmlns:p="http://schemas.openxmlformats.org/presentationml/2006/main" xmlns:r="http://schemas.openxmlformats.org/officeDocument/2006/relationships">
+  <p:cSld>
+    <p:bg>
+      <p:bgPr>
+        <a:solidFill>
+          <a:srgbClr val="00FF00"/>
+        </a:solidFill>
+        <a:effectLst/>
+      </p:bgPr>
+    </p:bg>
+    <p:spTree>
+      <p:nvGrpSpPr>
+        <p:cNvPr id="1" name=""/>
+        <p:cNvGrpSpPr/>
+        <p:nvPr/>
+      </p:nvGrpSpPr>
+      <p:grpSpPr/>
+      <p:sp>
+        <p:nvSpPr>
+          <p:cNvPr id="2" name="TextBox 1"/>
+          <p:cNvSpPr txBox="1"/>
+          <p:nvPr/>
+        </p:nvSpPr>
+        <p:spPr>
+          <a:xfrm>
+            <a:off x="624059" y="5400000"/>
+            <a:ext cx="10944000" cy="1188000"/>
+          </a:xfrm>
+          <a:prstGeom prst="rect">
+            <a:avLst/>
+          </a:prstGeom>
+          <a:solidFill>
+            <a:srgbClr val="203864"/>
+          </a:solidFill>
+        </p:spPr>
+        <p:txBody>
+          <a:bodyPr wrap="none" anchor="ctr">
+            <a:normAutofit/>
+          </a:bodyPr>
+          <a:lstStyle/>
+          <a:p>
+            <a:pPr algn="ctr">
+              <a:defRPr sz="3500">
+                <a:solidFill>
+                  <a:srgbClr val="FFFFFF"/>
+                </a:solidFill>
+                <a:latin typeface="Pretendard Semibold"/>
+              </a:defRPr>
+            </a:pPr>
+            <a:r>
+              <a:t>좋으신 하나님 인자와 자비 영원히</a:t>
+            </a:r>
+          </a:p>
+        </p:txBody>
+      </p:sp>
+      <p:sp>
+        <p:nvSpPr>
+          <p:cNvPr id="3" name="TextBox 2"/>
+          <p:cNvSpPr txBox="1"/>
+          <p:nvPr/>
+        </p:nvSpPr>
+        <p:spPr>
+          <a:xfrm>
+            <a:off x="8506800" y="4860000"/>
+            <a:ext cx="3060000" cy="540000"/>
+          </a:xfrm>
+          <a:prstGeom prst="rect">
+            <a:avLst/>
+          </a:prstGeom>
+          <a:solidFill>
+            <a:srgbClr val="FFFFFF"/>
+          </a:solidFill>
+        </p:spPr>
+        <p:txBody>
+          <a:bodyPr wrap="none" anchor="ctr">
+            <a:normAutofit/>
+          </a:bodyPr>
+          <a:lstStyle/>
+          <a:p>
+            <a:pPr algn="ctr">
+              <a:defRPr sz="2000">
+                <a:solidFill>
+                  <a:srgbClr val="000000"/>
+                </a:solidFill>
+                <a:latin typeface="Pretendard Black"/>
+              </a:defRPr>
+            </a:pPr>
+            <a:r>
+              <a:t>좋으신 하나님</a:t>
+            </a:r>
+          </a:p>
+        </p:txBody>
+      </p:sp>
+    </p:spTree>
+  </p:cSld>
+  <p:clrMapOvr>
+    <a:masterClrMapping/>
+  </p:clrMapOvr>
+</p:sld>
+</file>
+
+<file path=ppt/slides/slide170.xml><?xml version="1.0" encoding="utf-8"?>
 <p:sld xmlns:a="http://schemas.openxmlformats.org/drawingml/2006/main" xmlns:p="http://schemas.openxmlformats.org/presentationml/2006/main" xmlns:r="http://schemas.openxmlformats.org/officeDocument/2006/relationships">
   <p:cSld>
     <p:bg>
@@ -7749,33 +8438,33 @@
 </p:sld>
 </file>
 
-<file path=ppt/slides/slide162.xml><?xml version="1.0" encoding="utf-8"?>
-<p:sld xmlns:a="http://schemas.openxmlformats.org/drawingml/2006/main" xmlns:p="http://schemas.openxmlformats.org/presentationml/2006/main" xmlns:r="http://schemas.openxmlformats.org/officeDocument/2006/relationships">
-  <p:cSld>
-    <p:bg>
-      <p:bgPr>
-        <a:solidFill>
-          <a:srgbClr val="00FF00"/>
-        </a:solidFill>
-        <a:effectLst/>
-      </p:bgPr>
-    </p:bg>
-    <p:spTree>
-      <p:nvGrpSpPr>
-        <p:cNvPr id="1" name=""/>
-        <p:cNvGrpSpPr/>
-        <p:nvPr/>
-      </p:nvGrpSpPr>
-      <p:grpSpPr/>
-    </p:spTree>
-  </p:cSld>
-  <p:clrMapOvr>
-    <a:masterClrMapping/>
-  </p:clrMapOvr>
-</p:sld>
-</file>
-
-<file path=ppt/slides/slide163.xml><?xml version="1.0" encoding="utf-8"?>
+<file path=ppt/slides/slide171.xml><?xml version="1.0" encoding="utf-8"?>
+<p:sld xmlns:a="http://schemas.openxmlformats.org/drawingml/2006/main" xmlns:p="http://schemas.openxmlformats.org/presentationml/2006/main" xmlns:r="http://schemas.openxmlformats.org/officeDocument/2006/relationships">
+  <p:cSld>
+    <p:bg>
+      <p:bgPr>
+        <a:solidFill>
+          <a:srgbClr val="00FF00"/>
+        </a:solidFill>
+        <a:effectLst/>
+      </p:bgPr>
+    </p:bg>
+    <p:spTree>
+      <p:nvGrpSpPr>
+        <p:cNvPr id="1" name=""/>
+        <p:cNvGrpSpPr/>
+        <p:nvPr/>
+      </p:nvGrpSpPr>
+      <p:grpSpPr/>
+    </p:spTree>
+  </p:cSld>
+  <p:clrMapOvr>
+    <a:masterClrMapping/>
+  </p:clrMapOvr>
+</p:sld>
+</file>
+
+<file path=ppt/slides/slide172.xml><?xml version="1.0" encoding="utf-8"?>
 <p:sld xmlns:a="http://schemas.openxmlformats.org/drawingml/2006/main" xmlns:p="http://schemas.openxmlformats.org/presentationml/2006/main" xmlns:r="http://schemas.openxmlformats.org/officeDocument/2006/relationships">
   <p:cSld>
     <p:bg>
@@ -7826,7 +8515,7 @@
               </a:defRPr>
             </a:pPr>
             <a:r>
-              <a:t>주님 다시 오실때까지 나는 이 길을 가리라</a:t>
+              <a:t>우리 오늘 눈물로 한 알의 씨앗을 심는다</a:t>
             </a:r>
           </a:p>
         </p:txBody>
@@ -7864,20 +8553,20 @@
               </a:defRPr>
             </a:pPr>
             <a:r>
-              <a:t>주님 다시 오실 때 까지</a:t>
-            </a:r>
-          </a:p>
-        </p:txBody>
-      </p:sp>
-    </p:spTree>
-  </p:cSld>
-  <p:clrMapOvr>
-    <a:masterClrMapping/>
-  </p:clrMapOvr>
-</p:sld>
-</file>
-
-<file path=ppt/slides/slide164.xml><?xml version="1.0" encoding="utf-8"?>
+              <a:t>우리 오늘 눈물로</a:t>
+            </a:r>
+          </a:p>
+        </p:txBody>
+      </p:sp>
+    </p:spTree>
+  </p:cSld>
+  <p:clrMapOvr>
+    <a:masterClrMapping/>
+  </p:clrMapOvr>
+</p:sld>
+</file>
+
+<file path=ppt/slides/slide173.xml><?xml version="1.0" encoding="utf-8"?>
 <p:sld xmlns:a="http://schemas.openxmlformats.org/drawingml/2006/main" xmlns:p="http://schemas.openxmlformats.org/presentationml/2006/main" xmlns:r="http://schemas.openxmlformats.org/officeDocument/2006/relationships">
   <p:cSld>
     <p:bg>
@@ -7928,20 +8617,20 @@
               </a:defRPr>
             </a:pPr>
             <a:r>
-              <a:t>좁은문 좁은길 나의 십자가 지고</a:t>
-            </a:r>
-          </a:p>
-        </p:txBody>
-      </p:sp>
-    </p:spTree>
-  </p:cSld>
-  <p:clrMapOvr>
-    <a:masterClrMapping/>
-  </p:clrMapOvr>
-</p:sld>
-</file>
-
-<file path=ppt/slides/slide165.xml><?xml version="1.0" encoding="utf-8"?>
+              <a:t>꿈꿀 수 없어 무너진 가슴에</a:t>
+            </a:r>
+          </a:p>
+        </p:txBody>
+      </p:sp>
+    </p:spTree>
+  </p:cSld>
+  <p:clrMapOvr>
+    <a:masterClrMapping/>
+  </p:clrMapOvr>
+</p:sld>
+</file>
+
+<file path=ppt/slides/slide174.xml><?xml version="1.0" encoding="utf-8"?>
 <p:sld xmlns:a="http://schemas.openxmlformats.org/drawingml/2006/main" xmlns:p="http://schemas.openxmlformats.org/presentationml/2006/main" xmlns:r="http://schemas.openxmlformats.org/officeDocument/2006/relationships">
   <p:cSld>
     <p:bg>
@@ -7992,20 +8681,20 @@
               </a:defRPr>
             </a:pPr>
             <a:r>
-              <a:t>나의 가는 이 길 끝에서 나는 주님을 보리라</a:t>
-            </a:r>
-          </a:p>
-        </p:txBody>
-      </p:sp>
-    </p:spTree>
-  </p:cSld>
-  <p:clrMapOvr>
-    <a:masterClrMapping/>
-  </p:clrMapOvr>
-</p:sld>
-</file>
-
-<file path=ppt/slides/slide166.xml><?xml version="1.0" encoding="utf-8"?>
+              <a:t>저들의 푸른 꿈 다시 돋아 나도록</a:t>
+            </a:r>
+          </a:p>
+        </p:txBody>
+      </p:sp>
+    </p:spTree>
+  </p:cSld>
+  <p:clrMapOvr>
+    <a:masterClrMapping/>
+  </p:clrMapOvr>
+</p:sld>
+</file>
+
+<file path=ppt/slides/slide175.xml><?xml version="1.0" encoding="utf-8"?>
 <p:sld xmlns:a="http://schemas.openxmlformats.org/drawingml/2006/main" xmlns:p="http://schemas.openxmlformats.org/presentationml/2006/main" xmlns:r="http://schemas.openxmlformats.org/officeDocument/2006/relationships">
   <p:cSld>
     <p:bg>
@@ -8056,20 +8745,20 @@
               </a:defRPr>
             </a:pPr>
             <a:r>
-              <a:t>영광의 내 주님 나를 맞아 주시리</a:t>
-            </a:r>
-          </a:p>
-        </p:txBody>
-      </p:sp>
-    </p:spTree>
-  </p:cSld>
-  <p:clrMapOvr>
-    <a:masterClrMapping/>
-  </p:clrMapOvr>
-</p:sld>
-</file>
-
-<file path=ppt/slides/slide167.xml><?xml version="1.0" encoding="utf-8"?>
+              <a:t>우리 함께 땀 흘려 소망의 길을 만든다</a:t>
+            </a:r>
+          </a:p>
+        </p:txBody>
+      </p:sp>
+    </p:spTree>
+  </p:cSld>
+  <p:clrMapOvr>
+    <a:masterClrMapping/>
+  </p:clrMapOvr>
+</p:sld>
+</file>
+
+<file path=ppt/slides/slide176.xml><?xml version="1.0" encoding="utf-8"?>
 <p:sld xmlns:a="http://schemas.openxmlformats.org/drawingml/2006/main" xmlns:p="http://schemas.openxmlformats.org/presentationml/2006/main" xmlns:r="http://schemas.openxmlformats.org/officeDocument/2006/relationships">
   <p:cSld>
     <p:bg>
@@ -8120,20 +8809,20 @@
               </a:defRPr>
             </a:pPr>
             <a:r>
-              <a:t>주님 다시 오실때까지 나는 일어나 달려 가리라</a:t>
-            </a:r>
-          </a:p>
-        </p:txBody>
-      </p:sp>
-    </p:spTree>
-  </p:cSld>
-  <p:clrMapOvr>
-    <a:masterClrMapping/>
-  </p:clrMapOvr>
-</p:sld>
-</file>
-
-<file path=ppt/slides/slide168.xml><?xml version="1.0" encoding="utf-8"?>
+              <a:t>내일로 가는 길을 찾지 못했던</a:t>
+            </a:r>
+          </a:p>
+        </p:txBody>
+      </p:sp>
+    </p:spTree>
+  </p:cSld>
+  <p:clrMapOvr>
+    <a:masterClrMapping/>
+  </p:clrMapOvr>
+</p:sld>
+</file>
+
+<file path=ppt/slides/slide177.xml><?xml version="1.0" encoding="utf-8"?>
 <p:sld xmlns:a="http://schemas.openxmlformats.org/drawingml/2006/main" xmlns:p="http://schemas.openxmlformats.org/presentationml/2006/main" xmlns:r="http://schemas.openxmlformats.org/officeDocument/2006/relationships">
   <p:cSld>
     <p:bg>
@@ -8184,20 +8873,20 @@
               </a:defRPr>
             </a:pPr>
             <a:r>
-              <a:t>주의 영광 온땅 덮을때 나는 일어나 노래하리</a:t>
-            </a:r>
-          </a:p>
-        </p:txBody>
-      </p:sp>
-    </p:spTree>
-  </p:cSld>
-  <p:clrMapOvr>
-    <a:masterClrMapping/>
-  </p:clrMapOvr>
-</p:sld>
-</file>
-
-<file path=ppt/slides/slide169.xml><?xml version="1.0" encoding="utf-8"?>
+              <a:t>저들 노래하며 달려갈 그 길</a:t>
+            </a:r>
+          </a:p>
+        </p:txBody>
+      </p:sp>
+    </p:spTree>
+  </p:cSld>
+  <p:clrMapOvr>
+    <a:masterClrMapping/>
+  </p:clrMapOvr>
+</p:sld>
+</file>
+
+<file path=ppt/slides/slide178.xml><?xml version="1.0" encoding="utf-8"?>
 <p:sld xmlns:a="http://schemas.openxmlformats.org/drawingml/2006/main" xmlns:p="http://schemas.openxmlformats.org/presentationml/2006/main" xmlns:r="http://schemas.openxmlformats.org/officeDocument/2006/relationships">
   <p:cSld>
     <p:bg>
@@ -8248,20 +8937,20 @@
               </a:defRPr>
             </a:pPr>
             <a:r>
-              <a:t>내 사모하는 주님 온세상 구주시라</a:t>
-            </a:r>
-          </a:p>
-        </p:txBody>
-      </p:sp>
-    </p:spTree>
-  </p:cSld>
-  <p:clrMapOvr>
-    <a:masterClrMapping/>
-  </p:clrMapOvr>
-</p:sld>
-</file>
-
-<file path=ppt/slides/slide17.xml><?xml version="1.0" encoding="utf-8"?>
+              <a:t>그날에 우리 보리라 새벽 이슬 같은 저들 일어나</a:t>
+            </a:r>
+          </a:p>
+        </p:txBody>
+      </p:sp>
+    </p:spTree>
+  </p:cSld>
+  <p:clrMapOvr>
+    <a:masterClrMapping/>
+  </p:clrMapOvr>
+</p:sld>
+</file>
+
+<file path=ppt/slides/slide179.xml><?xml version="1.0" encoding="utf-8"?>
 <p:sld xmlns:a="http://schemas.openxmlformats.org/drawingml/2006/main" xmlns:p="http://schemas.openxmlformats.org/presentationml/2006/main" xmlns:r="http://schemas.openxmlformats.org/officeDocument/2006/relationships">
   <p:cSld>
     <p:bg>
@@ -8312,58 +9001,20 @@
               </a:defRPr>
             </a:pPr>
             <a:r>
-              <a:t>좋으신 하나님 인자와 자비 영원히</a:t>
-            </a:r>
-          </a:p>
-        </p:txBody>
-      </p:sp>
-      <p:sp>
-        <p:nvSpPr>
-          <p:cNvPr id="3" name="TextBox 2"/>
-          <p:cNvSpPr txBox="1"/>
-          <p:nvPr/>
-        </p:nvSpPr>
-        <p:spPr>
-          <a:xfrm>
-            <a:off x="8506800" y="4860000"/>
-            <a:ext cx="3060000" cy="540000"/>
-          </a:xfrm>
-          <a:prstGeom prst="rect">
-            <a:avLst/>
-          </a:prstGeom>
-          <a:solidFill>
-            <a:srgbClr val="FFFFFF"/>
-          </a:solidFill>
-        </p:spPr>
-        <p:txBody>
-          <a:bodyPr wrap="none" anchor="ctr">
-            <a:normAutofit/>
-          </a:bodyPr>
-          <a:lstStyle/>
-          <a:p>
-            <a:pPr algn="ctr">
-              <a:defRPr sz="2000">
-                <a:solidFill>
-                  <a:srgbClr val="000000"/>
-                </a:solidFill>
-                <a:latin typeface="Pretendard Black"/>
-              </a:defRPr>
-            </a:pPr>
-            <a:r>
-              <a:t>좋으신 하나님</a:t>
-            </a:r>
-          </a:p>
-        </p:txBody>
-      </p:sp>
-    </p:spTree>
-  </p:cSld>
-  <p:clrMapOvr>
-    <a:masterClrMapping/>
-  </p:clrMapOvr>
-</p:sld>
-</file>
-
-<file path=ppt/slides/slide170.xml><?xml version="1.0" encoding="utf-8"?>
+              <a:t>뜨거운 가슴 사랑의 손으로 이 땅 치유하며 행진할 때</a:t>
+            </a:r>
+          </a:p>
+        </p:txBody>
+      </p:sp>
+    </p:spTree>
+  </p:cSld>
+  <p:clrMapOvr>
+    <a:masterClrMapping/>
+  </p:clrMapOvr>
+</p:sld>
+</file>
+
+<file path=ppt/slides/slide18.xml><?xml version="1.0" encoding="utf-8"?>
 <p:sld xmlns:a="http://schemas.openxmlformats.org/drawingml/2006/main" xmlns:p="http://schemas.openxmlformats.org/presentationml/2006/main" xmlns:r="http://schemas.openxmlformats.org/officeDocument/2006/relationships">
   <p:cSld>
     <p:bg>
@@ -8414,46 +9065,174 @@
               </a:defRPr>
             </a:pPr>
             <a:r>
-              <a:t>내 사모하는 주님 영광의 왕이시라</a:t>
-            </a:r>
-          </a:p>
-        </p:txBody>
-      </p:sp>
-    </p:spTree>
-  </p:cSld>
-  <p:clrMapOvr>
-    <a:masterClrMapping/>
-  </p:clrMapOvr>
-</p:sld>
-</file>
-
-<file path=ppt/slides/slide171.xml><?xml version="1.0" encoding="utf-8"?>
-<p:sld xmlns:a="http://schemas.openxmlformats.org/drawingml/2006/main" xmlns:p="http://schemas.openxmlformats.org/presentationml/2006/main" xmlns:r="http://schemas.openxmlformats.org/officeDocument/2006/relationships">
-  <p:cSld>
-    <p:bg>
-      <p:bgPr>
-        <a:solidFill>
-          <a:srgbClr val="00FF00"/>
-        </a:solidFill>
-        <a:effectLst/>
-      </p:bgPr>
-    </p:bg>
-    <p:spTree>
-      <p:nvGrpSpPr>
-        <p:cNvPr id="1" name=""/>
-        <p:cNvGrpSpPr/>
-        <p:nvPr/>
-      </p:nvGrpSpPr>
-      <p:grpSpPr/>
-    </p:spTree>
-  </p:cSld>
-  <p:clrMapOvr>
-    <a:masterClrMapping/>
-  </p:clrMapOvr>
-</p:sld>
-</file>
-
-<file path=ppt/slides/slide172.xml><?xml version="1.0" encoding="utf-8"?>
+              <a:t>좋으신 하나님 인자와 자비 영원히</a:t>
+            </a:r>
+          </a:p>
+        </p:txBody>
+      </p:sp>
+    </p:spTree>
+  </p:cSld>
+  <p:clrMapOvr>
+    <a:masterClrMapping/>
+  </p:clrMapOvr>
+</p:sld>
+</file>
+
+<file path=ppt/slides/slide180.xml><?xml version="1.0" encoding="utf-8"?>
+<p:sld xmlns:a="http://schemas.openxmlformats.org/drawingml/2006/main" xmlns:p="http://schemas.openxmlformats.org/presentationml/2006/main" xmlns:r="http://schemas.openxmlformats.org/officeDocument/2006/relationships">
+  <p:cSld>
+    <p:bg>
+      <p:bgPr>
+        <a:solidFill>
+          <a:srgbClr val="00FF00"/>
+        </a:solidFill>
+        <a:effectLst/>
+      </p:bgPr>
+    </p:bg>
+    <p:spTree>
+      <p:nvGrpSpPr>
+        <p:cNvPr id="1" name=""/>
+        <p:cNvGrpSpPr/>
+        <p:nvPr/>
+      </p:nvGrpSpPr>
+      <p:grpSpPr/>
+      <p:sp>
+        <p:nvSpPr>
+          <p:cNvPr id="2" name="TextBox 1"/>
+          <p:cNvSpPr txBox="1"/>
+          <p:nvPr/>
+        </p:nvSpPr>
+        <p:spPr>
+          <a:xfrm>
+            <a:off x="624059" y="5400000"/>
+            <a:ext cx="10944000" cy="1188000"/>
+          </a:xfrm>
+          <a:prstGeom prst="rect">
+            <a:avLst/>
+          </a:prstGeom>
+          <a:solidFill>
+            <a:srgbClr val="203864"/>
+          </a:solidFill>
+        </p:spPr>
+        <p:txBody>
+          <a:bodyPr wrap="none" anchor="ctr">
+            <a:normAutofit/>
+          </a:bodyPr>
+          <a:lstStyle/>
+          <a:p>
+            <a:pPr algn="ctr">
+              <a:defRPr sz="3500">
+                <a:solidFill>
+                  <a:srgbClr val="FFFFFF"/>
+                </a:solidFill>
+                <a:latin typeface="Pretendard Semibold"/>
+              </a:defRPr>
+            </a:pPr>
+            <a:r>
+              <a:t>오래 황폐하였던 이 땅 어디서나 순결한 꽃들 피어나고</a:t>
+            </a:r>
+          </a:p>
+        </p:txBody>
+      </p:sp>
+    </p:spTree>
+  </p:cSld>
+  <p:clrMapOvr>
+    <a:masterClrMapping/>
+  </p:clrMapOvr>
+</p:sld>
+</file>
+
+<file path=ppt/slides/slide181.xml><?xml version="1.0" encoding="utf-8"?>
+<p:sld xmlns:a="http://schemas.openxmlformats.org/drawingml/2006/main" xmlns:p="http://schemas.openxmlformats.org/presentationml/2006/main" xmlns:r="http://schemas.openxmlformats.org/officeDocument/2006/relationships">
+  <p:cSld>
+    <p:bg>
+      <p:bgPr>
+        <a:solidFill>
+          <a:srgbClr val="00FF00"/>
+        </a:solidFill>
+        <a:effectLst/>
+      </p:bgPr>
+    </p:bg>
+    <p:spTree>
+      <p:nvGrpSpPr>
+        <p:cNvPr id="1" name=""/>
+        <p:cNvGrpSpPr/>
+        <p:nvPr/>
+      </p:nvGrpSpPr>
+      <p:grpSpPr/>
+      <p:sp>
+        <p:nvSpPr>
+          <p:cNvPr id="2" name="TextBox 1"/>
+          <p:cNvSpPr txBox="1"/>
+          <p:nvPr/>
+        </p:nvSpPr>
+        <p:spPr>
+          <a:xfrm>
+            <a:off x="624059" y="5400000"/>
+            <a:ext cx="10944000" cy="1188000"/>
+          </a:xfrm>
+          <a:prstGeom prst="rect">
+            <a:avLst/>
+          </a:prstGeom>
+          <a:solidFill>
+            <a:srgbClr val="203864"/>
+          </a:solidFill>
+        </p:spPr>
+        <p:txBody>
+          <a:bodyPr wrap="none" anchor="ctr">
+            <a:normAutofit/>
+          </a:bodyPr>
+          <a:lstStyle/>
+          <a:p>
+            <a:pPr algn="ctr">
+              <a:defRPr sz="3500">
+                <a:solidFill>
+                  <a:srgbClr val="FFFFFF"/>
+                </a:solidFill>
+                <a:latin typeface="Pretendard Semibold"/>
+              </a:defRPr>
+            </a:pPr>
+            <a:r>
+              <a:t>푸른 의의 나무가 가득한 세상 우리 함께 보리라</a:t>
+            </a:r>
+          </a:p>
+        </p:txBody>
+      </p:sp>
+    </p:spTree>
+  </p:cSld>
+  <p:clrMapOvr>
+    <a:masterClrMapping/>
+  </p:clrMapOvr>
+</p:sld>
+</file>
+
+<file path=ppt/slides/slide182.xml><?xml version="1.0" encoding="utf-8"?>
+<p:sld xmlns:a="http://schemas.openxmlformats.org/drawingml/2006/main" xmlns:p="http://schemas.openxmlformats.org/presentationml/2006/main" xmlns:r="http://schemas.openxmlformats.org/officeDocument/2006/relationships">
+  <p:cSld>
+    <p:bg>
+      <p:bgPr>
+        <a:solidFill>
+          <a:srgbClr val="00FF00"/>
+        </a:solidFill>
+        <a:effectLst/>
+      </p:bgPr>
+    </p:bg>
+    <p:spTree>
+      <p:nvGrpSpPr>
+        <p:cNvPr id="1" name=""/>
+        <p:cNvGrpSpPr/>
+        <p:nvPr/>
+      </p:nvGrpSpPr>
+      <p:grpSpPr/>
+    </p:spTree>
+  </p:cSld>
+  <p:clrMapOvr>
+    <a:masterClrMapping/>
+  </p:clrMapOvr>
+</p:sld>
+</file>
+
+<file path=ppt/slides/slide183.xml><?xml version="1.0" encoding="utf-8"?>
 <p:sld xmlns:a="http://schemas.openxmlformats.org/drawingml/2006/main" xmlns:p="http://schemas.openxmlformats.org/presentationml/2006/main" xmlns:r="http://schemas.openxmlformats.org/officeDocument/2006/relationships">
   <p:cSld>
     <p:bg>
@@ -8526,88 +9305,24 @@
 </p:sld>
 </file>
 
-<file path=ppt/slides/slide173.xml><?xml version="1.0" encoding="utf-8"?>
-<p:sld xmlns:a="http://schemas.openxmlformats.org/drawingml/2006/main" xmlns:p="http://schemas.openxmlformats.org/presentationml/2006/main" xmlns:r="http://schemas.openxmlformats.org/officeDocument/2006/relationships">
-  <p:cSld>
-    <p:bg>
-      <p:bgPr>
-        <a:solidFill>
-          <a:srgbClr val="00FF00"/>
-        </a:solidFill>
-        <a:effectLst/>
-      </p:bgPr>
-    </p:bg>
-    <p:spTree>
-      <p:nvGrpSpPr>
-        <p:cNvPr id="1" name=""/>
-        <p:cNvGrpSpPr/>
-        <p:nvPr/>
-      </p:nvGrpSpPr>
-      <p:grpSpPr/>
-    </p:spTree>
-  </p:cSld>
-  <p:clrMapOvr>
-    <a:masterClrMapping/>
-  </p:clrMapOvr>
-</p:sld>
-</file>
-
-<file path=ppt/slides/slide18.xml><?xml version="1.0" encoding="utf-8"?>
-<p:sld xmlns:a="http://schemas.openxmlformats.org/drawingml/2006/main" xmlns:p="http://schemas.openxmlformats.org/presentationml/2006/main" xmlns:r="http://schemas.openxmlformats.org/officeDocument/2006/relationships">
-  <p:cSld>
-    <p:bg>
-      <p:bgPr>
-        <a:solidFill>
-          <a:srgbClr val="00FF00"/>
-        </a:solidFill>
-        <a:effectLst/>
-      </p:bgPr>
-    </p:bg>
-    <p:spTree>
-      <p:nvGrpSpPr>
-        <p:cNvPr id="1" name=""/>
-        <p:cNvGrpSpPr/>
-        <p:nvPr/>
-      </p:nvGrpSpPr>
-      <p:grpSpPr/>
-      <p:sp>
-        <p:nvSpPr>
-          <p:cNvPr id="2" name="TextBox 1"/>
-          <p:cNvSpPr txBox="1"/>
-          <p:nvPr/>
-        </p:nvSpPr>
-        <p:spPr>
-          <a:xfrm>
-            <a:off x="624059" y="5400000"/>
-            <a:ext cx="10944000" cy="1188000"/>
-          </a:xfrm>
-          <a:prstGeom prst="rect">
-            <a:avLst/>
-          </a:prstGeom>
-          <a:solidFill>
-            <a:srgbClr val="203864"/>
-          </a:solidFill>
-        </p:spPr>
-        <p:txBody>
-          <a:bodyPr wrap="none" anchor="ctr">
-            <a:normAutofit/>
-          </a:bodyPr>
-          <a:lstStyle/>
-          <a:p>
-            <a:pPr algn="ctr">
-              <a:defRPr sz="3500">
-                <a:solidFill>
-                  <a:srgbClr val="FFFFFF"/>
-                </a:solidFill>
-                <a:latin typeface="Pretendard Semibold"/>
-              </a:defRPr>
-            </a:pPr>
-            <a:r>
-              <a:t>좋으신 하나님 인자와 자비 영원히</a:t>
-            </a:r>
-          </a:p>
-        </p:txBody>
-      </p:sp>
+<file path=ppt/slides/slide184.xml><?xml version="1.0" encoding="utf-8"?>
+<p:sld xmlns:a="http://schemas.openxmlformats.org/drawingml/2006/main" xmlns:p="http://schemas.openxmlformats.org/presentationml/2006/main" xmlns:r="http://schemas.openxmlformats.org/officeDocument/2006/relationships">
+  <p:cSld>
+    <p:bg>
+      <p:bgPr>
+        <a:solidFill>
+          <a:srgbClr val="00FF00"/>
+        </a:solidFill>
+        <a:effectLst/>
+      </p:bgPr>
+    </p:bg>
+    <p:spTree>
+      <p:nvGrpSpPr>
+        <p:cNvPr id="1" name=""/>
+        <p:cNvGrpSpPr/>
+        <p:nvPr/>
+      </p:nvGrpSpPr>
+      <p:grpSpPr/>
     </p:spTree>
   </p:cSld>
   <p:clrMapOvr>
